--- a/public/vaidesign/marca/apresentacao.pptx
+++ b/public/vaidesign/marca/apresentacao.pptx
@@ -4920,7 +4920,7 @@
                 <a:cs typeface="Hanken Grotesk"/>
                 <a:sym typeface="Hanken Grotesk"/>
               </a:rPr>
-              <a:t>+351 913 014 170</a:t>
+              <a:t>+351 965 633 614</a:t>
             </a:r>
             <a:endParaRPr b="0" i="0" sz="3000" u="none" cap="none" strike="noStrike">
               <a:solidFill>
